--- a/generated/Tier 1 Broker Scorecards/Pacific Atlantic Insurance Services Inc_Broker_Scorecard.pptx
+++ b/generated/Tier 1 Broker Scorecards/Pacific Atlantic Insurance Services Inc_Broker_Scorecard.pptx
@@ -3690,7 +3690,7 @@
                         <a:rPr sz="900">
                           <a:latin typeface="Segoe UI"/>
                         </a:rPr>
-                        <a:t>Fleet Bound Premium: $142,583.30</a:t>
+                        <a:t>Fleet Bound Premium: $148,134.77</a:t>
                       </a:r>
                     </a:p>
                   </a:txBody>
@@ -3727,7 +3727,7 @@
                         <a:rPr sz="900">
                           <a:latin typeface="Segoe UI"/>
                         </a:rPr>
-                        <a:t>Fleet Book %: 44.5%</a:t>
+                        <a:t>Fleet Book %: 46.2%</a:t>
                       </a:r>
                     </a:p>
                   </a:txBody>
@@ -3803,7 +3803,7 @@
                         <a:rPr sz="900">
                           <a:latin typeface="Segoe UI"/>
                         </a:rPr>
-                        <a:t>Non-Fleet Bound Premium: $178,054.21</a:t>
+                        <a:t>Non-Fleet Bound Premium: $172,502.74</a:t>
                       </a:r>
                     </a:p>
                   </a:txBody>
@@ -3840,7 +3840,7 @@
                         <a:rPr sz="900">
                           <a:latin typeface="Segoe UI"/>
                         </a:rPr>
-                        <a:t>Non-Fleet Book %: 55.5%</a:t>
+                        <a:t>Non-Fleet Book %: 53.8%</a:t>
                       </a:r>
                     </a:p>
                   </a:txBody>

--- a/generated/Tier 1 Broker Scorecards/Pacific Atlantic Insurance Services Inc_Broker_Scorecard.pptx
+++ b/generated/Tier 1 Broker Scorecards/Pacific Atlantic Insurance Services Inc_Broker_Scorecard.pptx
@@ -3394,7 +3394,7 @@
                         <a:rPr sz="900">
                           <a:latin typeface="Segoe UI"/>
                         </a:rPr>
-                        <a:t>Tier 1  |  10.34% / 15.00%</a:t>
+                        <a:t>Tier 1  |  10.00% / 15.00%</a:t>
                       </a:r>
                     </a:p>
                   </a:txBody>
@@ -3690,7 +3690,7 @@
                         <a:rPr sz="900">
                           <a:latin typeface="Segoe UI"/>
                         </a:rPr>
-                        <a:t>Fleet Bound Premium: $148,134.77</a:t>
+                        <a:t>Fleet Bound Premium: $142,583.30</a:t>
                       </a:r>
                     </a:p>
                   </a:txBody>
@@ -3727,7 +3727,7 @@
                         <a:rPr sz="900">
                           <a:latin typeface="Segoe UI"/>
                         </a:rPr>
-                        <a:t>Fleet Book %: 46.2%</a:t>
+                        <a:t>Fleet Book %: 44.5%</a:t>
                       </a:r>
                     </a:p>
                   </a:txBody>
@@ -3766,7 +3766,7 @@
                         <a:rPr sz="900">
                           <a:latin typeface="Segoe UI"/>
                         </a:rPr>
-                        <a:t>Non-Fleet Subs: 79  |  Binds: 8</a:t>
+                        <a:t>Non-Fleet Subs: 82  |  Binds: 8</a:t>
                       </a:r>
                     </a:p>
                   </a:txBody>
@@ -3803,7 +3803,7 @@
                         <a:rPr sz="900">
                           <a:latin typeface="Segoe UI"/>
                         </a:rPr>
-                        <a:t>Non-Fleet Bound Premium: $172,502.74</a:t>
+                        <a:t>Non-Fleet Bound Premium: $178,054.21</a:t>
                       </a:r>
                     </a:p>
                   </a:txBody>
@@ -3840,7 +3840,7 @@
                         <a:rPr sz="900">
                           <a:latin typeface="Segoe UI"/>
                         </a:rPr>
-                        <a:t>Non-Fleet Book %: 53.8%</a:t>
+                        <a:t>Non-Fleet Book %: 55.5%</a:t>
                       </a:r>
                     </a:p>
                   </a:txBody>
@@ -4421,11 +4421,11 @@
                       <a:r>
                         <a:rPr sz="800">
                           <a:solidFill>
-                            <a:srgbClr val="DC2626"/>
+                            <a:srgbClr val="059669"/>
                           </a:solidFill>
                           <a:latin typeface="Segoe UI"/>
                         </a:rPr>
-                        <a:t>7</a:t>
+                        <a:t>10</a:t>
                       </a:r>
                     </a:p>
                   </a:txBody>

--- a/generated/Tier 1 Broker Scorecards/Pacific Atlantic Insurance Services Inc_Broker_Scorecard.pptx
+++ b/generated/Tier 1 Broker Scorecards/Pacific Atlantic Insurance Services Inc_Broker_Scorecard.pptx
@@ -3394,7 +3394,7 @@
                         <a:rPr sz="900">
                           <a:latin typeface="Segoe UI"/>
                         </a:rPr>
-                        <a:t>Tier 1  |  10.00% / 15.00%</a:t>
+                        <a:t>Tier 1  |  9.89% / 15.00%</a:t>
                       </a:r>
                     </a:p>
                   </a:txBody>
@@ -3690,7 +3690,7 @@
                         <a:rPr sz="900">
                           <a:latin typeface="Segoe UI"/>
                         </a:rPr>
-                        <a:t>Fleet Bound Premium: $142,583.30</a:t>
+                        <a:t>Fleet Bound Premium: $148,134.77</a:t>
                       </a:r>
                     </a:p>
                   </a:txBody>
@@ -3727,7 +3727,7 @@
                         <a:rPr sz="900">
                           <a:latin typeface="Segoe UI"/>
                         </a:rPr>
-                        <a:t>Fleet Book %: 44.5%</a:t>
+                        <a:t>Fleet Book %: 46.2%</a:t>
                       </a:r>
                     </a:p>
                   </a:txBody>
@@ -3766,7 +3766,7 @@
                         <a:rPr sz="900">
                           <a:latin typeface="Segoe UI"/>
                         </a:rPr>
-                        <a:t>Non-Fleet Subs: 82  |  Binds: 8</a:t>
+                        <a:t>Non-Fleet Subs: 83  |  Binds: 8</a:t>
                       </a:r>
                     </a:p>
                   </a:txBody>
@@ -3803,7 +3803,7 @@
                         <a:rPr sz="900">
                           <a:latin typeface="Segoe UI"/>
                         </a:rPr>
-                        <a:t>Non-Fleet Bound Premium: $178,054.21</a:t>
+                        <a:t>Non-Fleet Bound Premium: $172,502.74</a:t>
                       </a:r>
                     </a:p>
                   </a:txBody>
@@ -3840,7 +3840,7 @@
                         <a:rPr sz="900">
                           <a:latin typeface="Segoe UI"/>
                         </a:rPr>
-                        <a:t>Non-Fleet Book %: 55.5%</a:t>
+                        <a:t>Non-Fleet Book %: 53.8%</a:t>
                       </a:r>
                     </a:p>
                   </a:txBody>
@@ -4425,7 +4425,7 @@
                           </a:solidFill>
                           <a:latin typeface="Segoe UI"/>
                         </a:rPr>
-                        <a:t>10</a:t>
+                        <a:t>11</a:t>
                       </a:r>
                     </a:p>
                   </a:txBody>

--- a/generated/Tier 1 Broker Scorecards/Pacific Atlantic Insurance Services Inc_Broker_Scorecard.pptx
+++ b/generated/Tier 1 Broker Scorecards/Pacific Atlantic Insurance Services Inc_Broker_Scorecard.pptx
@@ -3394,7 +3394,7 @@
                         <a:rPr sz="900">
                           <a:latin typeface="Segoe UI"/>
                         </a:rPr>
-                        <a:t>Tier 1  |  9.89% / 15.00%</a:t>
+                        <a:t>Tier 1  |  8.70% / 15.00%</a:t>
                       </a:r>
                     </a:p>
                   </a:txBody>
@@ -3690,7 +3690,7 @@
                         <a:rPr sz="900">
                           <a:latin typeface="Segoe UI"/>
                         </a:rPr>
-                        <a:t>Fleet Bound Premium: $148,134.77</a:t>
+                        <a:t>Fleet Bound Premium: $153,706.90</a:t>
                       </a:r>
                     </a:p>
                   </a:txBody>
@@ -3727,7 +3727,7 @@
                         <a:rPr sz="900">
                           <a:latin typeface="Segoe UI"/>
                         </a:rPr>
-                        <a:t>Fleet Book %: 46.2%</a:t>
+                        <a:t>Fleet Book %: 47.9%</a:t>
                       </a:r>
                     </a:p>
                   </a:txBody>
@@ -3766,7 +3766,7 @@
                         <a:rPr sz="900">
                           <a:latin typeface="Segoe UI"/>
                         </a:rPr>
-                        <a:t>Non-Fleet Subs: 83  |  Binds: 8</a:t>
+                        <a:t>Non-Fleet Subs: 84  |  Binds: 7</a:t>
                       </a:r>
                     </a:p>
                   </a:txBody>
@@ -3803,7 +3803,7 @@
                         <a:rPr sz="900">
                           <a:latin typeface="Segoe UI"/>
                         </a:rPr>
-                        <a:t>Non-Fleet Bound Premium: $172,502.74</a:t>
+                        <a:t>Non-Fleet Bound Premium: $166,930.61</a:t>
                       </a:r>
                     </a:p>
                   </a:txBody>
@@ -3840,7 +3840,7 @@
                         <a:rPr sz="900">
                           <a:latin typeface="Segoe UI"/>
                         </a:rPr>
-                        <a:t>Non-Fleet Book %: 53.8%</a:t>
+                        <a:t>Non-Fleet Book %: 52.1%</a:t>
                       </a:r>
                     </a:p>
                   </a:txBody>
@@ -4425,7 +4425,7 @@
                           </a:solidFill>
                           <a:latin typeface="Segoe UI"/>
                         </a:rPr>
-                        <a:t>11</a:t>
+                        <a:t>12</a:t>
                       </a:r>
                     </a:p>
                   </a:txBody>

--- a/generated/Tier 1 Broker Scorecards/Pacific Atlantic Insurance Services Inc_Broker_Scorecard.pptx
+++ b/generated/Tier 1 Broker Scorecards/Pacific Atlantic Insurance Services Inc_Broker_Scorecard.pptx
@@ -3394,7 +3394,7 @@
                         <a:rPr sz="900">
                           <a:latin typeface="Segoe UI"/>
                         </a:rPr>
-                        <a:t>Tier 1  |  8.70% / 15.00%</a:t>
+                        <a:t>Tier 1  |  9.78% / 15.00%</a:t>
                       </a:r>
                     </a:p>
                   </a:txBody>
@@ -3690,7 +3690,7 @@
                         <a:rPr sz="900">
                           <a:latin typeface="Segoe UI"/>
                         </a:rPr>
-                        <a:t>Fleet Bound Premium: $153,706.90</a:t>
+                        <a:t>Fleet Bound Premium: $142,583.30</a:t>
                       </a:r>
                     </a:p>
                   </a:txBody>
@@ -3727,7 +3727,7 @@
                         <a:rPr sz="900">
                           <a:latin typeface="Segoe UI"/>
                         </a:rPr>
-                        <a:t>Fleet Book %: 47.9%</a:t>
+                        <a:t>Fleet Book %: 44.5%</a:t>
                       </a:r>
                     </a:p>
                   </a:txBody>
@@ -3766,7 +3766,7 @@
                         <a:rPr sz="900">
                           <a:latin typeface="Segoe UI"/>
                         </a:rPr>
-                        <a:t>Non-Fleet Subs: 84  |  Binds: 7</a:t>
+                        <a:t>Non-Fleet Subs: 84  |  Binds: 8</a:t>
                       </a:r>
                     </a:p>
                   </a:txBody>
@@ -3803,7 +3803,7 @@
                         <a:rPr sz="900">
                           <a:latin typeface="Segoe UI"/>
                         </a:rPr>
-                        <a:t>Non-Fleet Bound Premium: $166,930.61</a:t>
+                        <a:t>Non-Fleet Bound Premium: $178,054.21</a:t>
                       </a:r>
                     </a:p>
                   </a:txBody>
@@ -3840,7 +3840,7 @@
                         <a:rPr sz="900">
                           <a:latin typeface="Segoe UI"/>
                         </a:rPr>
-                        <a:t>Non-Fleet Book %: 52.1%</a:t>
+                        <a:t>Non-Fleet Book %: 55.5%</a:t>
                       </a:r>
                     </a:p>
                   </a:txBody>

--- a/generated/Tier 1 Broker Scorecards/Pacific Atlantic Insurance Services Inc_Broker_Scorecard.pptx
+++ b/generated/Tier 1 Broker Scorecards/Pacific Atlantic Insurance Services Inc_Broker_Scorecard.pptx
@@ -3394,7 +3394,7 @@
                         <a:rPr sz="900">
                           <a:latin typeface="Segoe UI"/>
                         </a:rPr>
-                        <a:t>Tier 1  |  9.78% / 15.00%</a:t>
+                        <a:t>Tier 1  |  8.70% / 15.00%</a:t>
                       </a:r>
                     </a:p>
                   </a:txBody>
@@ -3690,7 +3690,7 @@
                         <a:rPr sz="900">
                           <a:latin typeface="Segoe UI"/>
                         </a:rPr>
-                        <a:t>Fleet Bound Premium: $148,134.77</a:t>
+                        <a:t>Fleet Bound Premium: $153,706.90</a:t>
                       </a:r>
                     </a:p>
                   </a:txBody>
@@ -3727,7 +3727,7 @@
                         <a:rPr sz="900">
                           <a:latin typeface="Segoe UI"/>
                         </a:rPr>
-                        <a:t>Fleet Book %: 46.2%</a:t>
+                        <a:t>Fleet Book %: 47.9%</a:t>
                       </a:r>
                     </a:p>
                   </a:txBody>
@@ -3766,7 +3766,7 @@
                         <a:rPr sz="900">
                           <a:latin typeface="Segoe UI"/>
                         </a:rPr>
-                        <a:t>Non-Fleet Subs: 84  |  Binds: 8</a:t>
+                        <a:t>Non-Fleet Subs: 84  |  Binds: 7</a:t>
                       </a:r>
                     </a:p>
                   </a:txBody>
@@ -3803,7 +3803,7 @@
                         <a:rPr sz="900">
                           <a:latin typeface="Segoe UI"/>
                         </a:rPr>
-                        <a:t>Non-Fleet Bound Premium: $172,502.74</a:t>
+                        <a:t>Non-Fleet Bound Premium: $166,930.61</a:t>
                       </a:r>
                     </a:p>
                   </a:txBody>
@@ -3840,7 +3840,7 @@
                         <a:rPr sz="900">
                           <a:latin typeface="Segoe UI"/>
                         </a:rPr>
-                        <a:t>Non-Fleet Book %: 53.8%</a:t>
+                        <a:t>Non-Fleet Book %: 52.1%</a:t>
                       </a:r>
                     </a:p>
                   </a:txBody>

--- a/generated/Tier 1 Broker Scorecards/Pacific Atlantic Insurance Services Inc_Broker_Scorecard.pptx
+++ b/generated/Tier 1 Broker Scorecards/Pacific Atlantic Insurance Services Inc_Broker_Scorecard.pptx
@@ -3394,7 +3394,7 @@
                         <a:rPr sz="900">
                           <a:latin typeface="Segoe UI"/>
                         </a:rPr>
-                        <a:t>Tier 1  |  8.70% / 15.00%</a:t>
+                        <a:t>Tier 1  |  8.42% / 15.00%</a:t>
                       </a:r>
                     </a:p>
                   </a:txBody>
@@ -3690,7 +3690,7 @@
                         <a:rPr sz="900">
                           <a:latin typeface="Segoe UI"/>
                         </a:rPr>
-                        <a:t>Fleet Bound Premium: $153,706.90</a:t>
+                        <a:t>Fleet Bound Premium: $168,909.49</a:t>
                       </a:r>
                     </a:p>
                   </a:txBody>
@@ -3727,7 +3727,7 @@
                         <a:rPr sz="900">
                           <a:latin typeface="Segoe UI"/>
                         </a:rPr>
-                        <a:t>Fleet Book %: 47.9%</a:t>
+                        <a:t>Fleet Book %: 52.7%</a:t>
                       </a:r>
                     </a:p>
                   </a:txBody>
@@ -3766,7 +3766,7 @@
                         <a:rPr sz="900">
                           <a:latin typeface="Segoe UI"/>
                         </a:rPr>
-                        <a:t>Non-Fleet Subs: 84  |  Binds: 7</a:t>
+                        <a:t>Non-Fleet Subs: 87  |  Binds: 7</a:t>
                       </a:r>
                     </a:p>
                   </a:txBody>
@@ -3803,7 +3803,7 @@
                         <a:rPr sz="900">
                           <a:latin typeface="Segoe UI"/>
                         </a:rPr>
-                        <a:t>Non-Fleet Bound Premium: $166,930.61</a:t>
+                        <a:t>Non-Fleet Bound Premium: $151,728.02</a:t>
                       </a:r>
                     </a:p>
                   </a:txBody>
@@ -3840,7 +3840,7 @@
                         <a:rPr sz="900">
                           <a:latin typeface="Segoe UI"/>
                         </a:rPr>
-                        <a:t>Non-Fleet Book %: 52.1%</a:t>
+                        <a:t>Non-Fleet Book %: 47.3%</a:t>
                       </a:r>
                     </a:p>
                   </a:txBody>
@@ -4425,7 +4425,7 @@
                           </a:solidFill>
                           <a:latin typeface="Segoe UI"/>
                         </a:rPr>
-                        <a:t>12</a:t>
+                        <a:t>16</a:t>
                       </a:r>
                     </a:p>
                   </a:txBody>

--- a/generated/Tier 1 Broker Scorecards/Pacific Atlantic Insurance Services Inc_Broker_Scorecard.pptx
+++ b/generated/Tier 1 Broker Scorecards/Pacific Atlantic Insurance Services Inc_Broker_Scorecard.pptx
@@ -3394,7 +3394,7 @@
                         <a:rPr sz="900">
                           <a:latin typeface="Segoe UI"/>
                         </a:rPr>
-                        <a:t>Tier 1  |  8.42% / 15.00%</a:t>
+                        <a:t>Tier 1  |  8.33% / 15.00%</a:t>
                       </a:r>
                     </a:p>
                   </a:txBody>
@@ -3766,7 +3766,7 @@
                         <a:rPr sz="900">
                           <a:latin typeface="Segoe UI"/>
                         </a:rPr>
-                        <a:t>Non-Fleet Subs: 87  |  Binds: 7</a:t>
+                        <a:t>Non-Fleet Subs: 88  |  Binds: 7</a:t>
                       </a:r>
                     </a:p>
                   </a:txBody>
@@ -4425,7 +4425,7 @@
                           </a:solidFill>
                           <a:latin typeface="Segoe UI"/>
                         </a:rPr>
-                        <a:t>16</a:t>
+                        <a:t>17</a:t>
                       </a:r>
                     </a:p>
                   </a:txBody>

--- a/generated/Tier 1 Broker Scorecards/Pacific Atlantic Insurance Services Inc_Broker_Scorecard.pptx
+++ b/generated/Tier 1 Broker Scorecards/Pacific Atlantic Insurance Services Inc_Broker_Scorecard.pptx
@@ -3394,7 +3394,7 @@
                         <a:rPr sz="900">
                           <a:latin typeface="Segoe UI"/>
                         </a:rPr>
-                        <a:t>Tier 1  |  8.33% / 15.00%</a:t>
+                        <a:t>Tier 1  |  7.29% / 15.00%</a:t>
                       </a:r>
                     </a:p>
                   </a:txBody>
@@ -3690,7 +3690,7 @@
                         <a:rPr sz="900">
                           <a:latin typeface="Segoe UI"/>
                         </a:rPr>
-                        <a:t>Fleet Bound Premium: $168,909.49</a:t>
+                        <a:t>Fleet Bound Premium: $176,192.53</a:t>
                       </a:r>
                     </a:p>
                   </a:txBody>
@@ -3727,7 +3727,7 @@
                         <a:rPr sz="900">
                           <a:latin typeface="Segoe UI"/>
                         </a:rPr>
-                        <a:t>Fleet Book %: 52.7%</a:t>
+                        <a:t>Fleet Book %: 55.0%</a:t>
                       </a:r>
                     </a:p>
                   </a:txBody>
@@ -3766,7 +3766,7 @@
                         <a:rPr sz="900">
                           <a:latin typeface="Segoe UI"/>
                         </a:rPr>
-                        <a:t>Non-Fleet Subs: 88  |  Binds: 7</a:t>
+                        <a:t>Non-Fleet Subs: 88  |  Binds: 6</a:t>
                       </a:r>
                     </a:p>
                   </a:txBody>
@@ -3803,7 +3803,7 @@
                         <a:rPr sz="900">
                           <a:latin typeface="Segoe UI"/>
                         </a:rPr>
-                        <a:t>Non-Fleet Bound Premium: $151,728.02</a:t>
+                        <a:t>Non-Fleet Bound Premium: $144,444.98</a:t>
                       </a:r>
                     </a:p>
                   </a:txBody>
@@ -3840,7 +3840,7 @@
                         <a:rPr sz="900">
                           <a:latin typeface="Segoe UI"/>
                         </a:rPr>
-                        <a:t>Non-Fleet Book %: 47.3%</a:t>
+                        <a:t>Non-Fleet Book %: 45.0%</a:t>
                       </a:r>
                     </a:p>
                   </a:txBody>

--- a/generated/Tier 1 Broker Scorecards/Pacific Atlantic Insurance Services Inc_Broker_Scorecard.pptx
+++ b/generated/Tier 1 Broker Scorecards/Pacific Atlantic Insurance Services Inc_Broker_Scorecard.pptx
@@ -3394,7 +3394,7 @@
                         <a:rPr sz="900">
                           <a:latin typeface="Segoe UI"/>
                         </a:rPr>
-                        <a:t>Tier 1  |  7.29% / 15.00%</a:t>
+                        <a:t>Tier 1  |  8.33% / 15.00%</a:t>
                       </a:r>
                     </a:p>
                   </a:txBody>
@@ -3690,7 +3690,7 @@
                         <a:rPr sz="900">
                           <a:latin typeface="Segoe UI"/>
                         </a:rPr>
-                        <a:t>Fleet Bound Premium: $176,192.53</a:t>
+                        <a:t>Fleet Bound Premium: $161,729.48</a:t>
                       </a:r>
                     </a:p>
                   </a:txBody>
@@ -3727,7 +3727,7 @@
                         <a:rPr sz="900">
                           <a:latin typeface="Segoe UI"/>
                         </a:rPr>
-                        <a:t>Fleet Book %: 55.0%</a:t>
+                        <a:t>Fleet Book %: 50.4%</a:t>
                       </a:r>
                     </a:p>
                   </a:txBody>
@@ -3766,7 +3766,7 @@
                         <a:rPr sz="900">
                           <a:latin typeface="Segoe UI"/>
                         </a:rPr>
-                        <a:t>Non-Fleet Subs: 88  |  Binds: 6</a:t>
+                        <a:t>Non-Fleet Subs: 88  |  Binds: 7</a:t>
                       </a:r>
                     </a:p>
                   </a:txBody>
@@ -3803,7 +3803,7 @@
                         <a:rPr sz="900">
                           <a:latin typeface="Segoe UI"/>
                         </a:rPr>
-                        <a:t>Non-Fleet Bound Premium: $144,444.98</a:t>
+                        <a:t>Non-Fleet Bound Premium: $158,908.03</a:t>
                       </a:r>
                     </a:p>
                   </a:txBody>
@@ -3840,7 +3840,7 @@
                         <a:rPr sz="900">
                           <a:latin typeface="Segoe UI"/>
                         </a:rPr>
-                        <a:t>Non-Fleet Book %: 45.0%</a:t>
+                        <a:t>Non-Fleet Book %: 49.6%</a:t>
                       </a:r>
                     </a:p>
                   </a:txBody>

--- a/generated/Tier 1 Broker Scorecards/Pacific Atlantic Insurance Services Inc_Broker_Scorecard.pptx
+++ b/generated/Tier 1 Broker Scorecards/Pacific Atlantic Insurance Services Inc_Broker_Scorecard.pptx
@@ -3690,7 +3690,7 @@
                         <a:rPr sz="900">
                           <a:latin typeface="Segoe UI"/>
                         </a:rPr>
-                        <a:t>Fleet Bound Premium: $161,729.48</a:t>
+                        <a:t>Fleet Bound Premium: $168,909.49</a:t>
                       </a:r>
                     </a:p>
                   </a:txBody>
@@ -3727,7 +3727,7 @@
                         <a:rPr sz="900">
                           <a:latin typeface="Segoe UI"/>
                         </a:rPr>
-                        <a:t>Fleet Book %: 50.4%</a:t>
+                        <a:t>Fleet Book %: 52.7%</a:t>
                       </a:r>
                     </a:p>
                   </a:txBody>
@@ -3803,7 +3803,7 @@
                         <a:rPr sz="900">
                           <a:latin typeface="Segoe UI"/>
                         </a:rPr>
-                        <a:t>Non-Fleet Bound Premium: $158,908.03</a:t>
+                        <a:t>Non-Fleet Bound Premium: $151,728.02</a:t>
                       </a:r>
                     </a:p>
                   </a:txBody>
@@ -3840,7 +3840,7 @@
                         <a:rPr sz="900">
                           <a:latin typeface="Segoe UI"/>
                         </a:rPr>
-                        <a:t>Non-Fleet Book %: 49.6%</a:t>
+                        <a:t>Non-Fleet Book %: 47.3%</a:t>
                       </a:r>
                     </a:p>
                   </a:txBody>
